--- a/Day4_Likelihood_BayesI/FW536_Day4_Morning_maximum likelihod.pptx
+++ b/Day4_Likelihood_BayesI/FW536_Day4_Morning_maximum likelihod.pptx
@@ -234,7 +234,7 @@
           <a:p>
             <a:fld id="{F8E9C380-474B-B64D-9372-661513FD5BBF}" type="datetimeFigureOut">
               <a:rPr lang="en-US" smtClean="0"/>
-              <a:t>9/21/25</a:t>
+              <a:t>9/11/26</a:t>
             </a:fld>
             <a:endParaRPr lang="en-US"/>
           </a:p>
@@ -641,7 +641,7 @@
               </a14:hiddenEffects>
             </a:ext>
             <a:ext uri="{FAA26D3D-D897-4be2-8F04-BA451C77F1D7}">
-              <ma14:placeholderFlag xmlns="" xmlns:ma14="http://schemas.microsoft.com/office/mac/drawingml/2011/main" val="1"/>
+              <ma14:placeholderFlag xmlns:ma14="http://schemas.microsoft.com/office/mac/drawingml/2011/main" xmlns="" val="1"/>
             </a:ext>
           </a:extLst>
         </p:spPr>
@@ -726,7 +726,7 @@
               </a14:hiddenEffects>
             </a:ext>
             <a:ext uri="{FAA26D3D-D897-4be2-8F04-BA451C77F1D7}">
-              <ma14:placeholderFlag xmlns="" xmlns:ma14="http://schemas.microsoft.com/office/mac/drawingml/2011/main" val="1"/>
+              <ma14:placeholderFlag xmlns:ma14="http://schemas.microsoft.com/office/mac/drawingml/2011/main" xmlns="" val="1"/>
             </a:ext>
           </a:extLst>
         </p:spPr>
@@ -811,7 +811,7 @@
               </a14:hiddenEffects>
             </a:ext>
             <a:ext uri="{FAA26D3D-D897-4be2-8F04-BA451C77F1D7}">
-              <ma14:placeholderFlag xmlns="" xmlns:ma14="http://schemas.microsoft.com/office/mac/drawingml/2011/main" val="1"/>
+              <ma14:placeholderFlag xmlns:ma14="http://schemas.microsoft.com/office/mac/drawingml/2011/main" xmlns="" val="1"/>
             </a:ext>
           </a:extLst>
         </p:spPr>
@@ -896,7 +896,7 @@
               </a14:hiddenEffects>
             </a:ext>
             <a:ext uri="{FAA26D3D-D897-4be2-8F04-BA451C77F1D7}">
-              <ma14:placeholderFlag xmlns="" xmlns:ma14="http://schemas.microsoft.com/office/mac/drawingml/2011/main" val="1"/>
+              <ma14:placeholderFlag xmlns:ma14="http://schemas.microsoft.com/office/mac/drawingml/2011/main" xmlns="" val="1"/>
             </a:ext>
           </a:extLst>
         </p:spPr>
@@ -981,7 +981,7 @@
               </a14:hiddenEffects>
             </a:ext>
             <a:ext uri="{FAA26D3D-D897-4be2-8F04-BA451C77F1D7}">
-              <ma14:placeholderFlag xmlns="" xmlns:ma14="http://schemas.microsoft.com/office/mac/drawingml/2011/main" val="1"/>
+              <ma14:placeholderFlag xmlns:ma14="http://schemas.microsoft.com/office/mac/drawingml/2011/main" xmlns="" val="1"/>
             </a:ext>
           </a:extLst>
         </p:spPr>
@@ -1066,7 +1066,7 @@
               </a14:hiddenEffects>
             </a:ext>
             <a:ext uri="{FAA26D3D-D897-4be2-8F04-BA451C77F1D7}">
-              <ma14:placeholderFlag xmlns="" xmlns:ma14="http://schemas.microsoft.com/office/mac/drawingml/2011/main" val="1"/>
+              <ma14:placeholderFlag xmlns:ma14="http://schemas.microsoft.com/office/mac/drawingml/2011/main" xmlns="" val="1"/>
             </a:ext>
           </a:extLst>
         </p:spPr>
@@ -1151,7 +1151,7 @@
               </a14:hiddenEffects>
             </a:ext>
             <a:ext uri="{FAA26D3D-D897-4be2-8F04-BA451C77F1D7}">
-              <ma14:placeholderFlag xmlns="" xmlns:ma14="http://schemas.microsoft.com/office/mac/drawingml/2011/main" val="1"/>
+              <ma14:placeholderFlag xmlns:ma14="http://schemas.microsoft.com/office/mac/drawingml/2011/main" xmlns="" val="1"/>
             </a:ext>
           </a:extLst>
         </p:spPr>
@@ -1236,7 +1236,7 @@
               </a14:hiddenEffects>
             </a:ext>
             <a:ext uri="{FAA26D3D-D897-4be2-8F04-BA451C77F1D7}">
-              <ma14:placeholderFlag xmlns="" xmlns:ma14="http://schemas.microsoft.com/office/mac/drawingml/2011/main" val="1"/>
+              <ma14:placeholderFlag xmlns:ma14="http://schemas.microsoft.com/office/mac/drawingml/2011/main" xmlns="" val="1"/>
             </a:ext>
           </a:extLst>
         </p:spPr>
@@ -1321,7 +1321,7 @@
               </a14:hiddenEffects>
             </a:ext>
             <a:ext uri="{FAA26D3D-D897-4be2-8F04-BA451C77F1D7}">
-              <ma14:placeholderFlag xmlns="" xmlns:ma14="http://schemas.microsoft.com/office/mac/drawingml/2011/main" val="1"/>
+              <ma14:placeholderFlag xmlns:ma14="http://schemas.microsoft.com/office/mac/drawingml/2011/main" xmlns="" val="1"/>
             </a:ext>
           </a:extLst>
         </p:spPr>
@@ -1406,7 +1406,7 @@
               </a14:hiddenEffects>
             </a:ext>
             <a:ext uri="{FAA26D3D-D897-4be2-8F04-BA451C77F1D7}">
-              <ma14:placeholderFlag xmlns="" xmlns:ma14="http://schemas.microsoft.com/office/mac/drawingml/2011/main" val="1"/>
+              <ma14:placeholderFlag xmlns:ma14="http://schemas.microsoft.com/office/mac/drawingml/2011/main" xmlns="" val="1"/>
             </a:ext>
           </a:extLst>
         </p:spPr>
@@ -1491,7 +1491,7 @@
               </a14:hiddenEffects>
             </a:ext>
             <a:ext uri="{FAA26D3D-D897-4be2-8F04-BA451C77F1D7}">
-              <ma14:placeholderFlag xmlns="" xmlns:ma14="http://schemas.microsoft.com/office/mac/drawingml/2011/main" val="1"/>
+              <ma14:placeholderFlag xmlns:ma14="http://schemas.microsoft.com/office/mac/drawingml/2011/main" xmlns="" val="1"/>
             </a:ext>
           </a:extLst>
         </p:spPr>
@@ -1576,7 +1576,7 @@
               </a14:hiddenEffects>
             </a:ext>
             <a:ext uri="{FAA26D3D-D897-4be2-8F04-BA451C77F1D7}">
-              <ma14:placeholderFlag xmlns="" xmlns:ma14="http://schemas.microsoft.com/office/mac/drawingml/2011/main" val="1"/>
+              <ma14:placeholderFlag xmlns:ma14="http://schemas.microsoft.com/office/mac/drawingml/2011/main" xmlns="" val="1"/>
             </a:ext>
           </a:extLst>
         </p:spPr>
@@ -1661,7 +1661,7 @@
               </a14:hiddenEffects>
             </a:ext>
             <a:ext uri="{FAA26D3D-D897-4be2-8F04-BA451C77F1D7}">
-              <ma14:placeholderFlag xmlns="" xmlns:ma14="http://schemas.microsoft.com/office/mac/drawingml/2011/main" val="1"/>
+              <ma14:placeholderFlag xmlns:ma14="http://schemas.microsoft.com/office/mac/drawingml/2011/main" xmlns="" val="1"/>
             </a:ext>
           </a:extLst>
         </p:spPr>
@@ -1746,7 +1746,7 @@
               </a14:hiddenEffects>
             </a:ext>
             <a:ext uri="{FAA26D3D-D897-4be2-8F04-BA451C77F1D7}">
-              <ma14:placeholderFlag xmlns="" xmlns:ma14="http://schemas.microsoft.com/office/mac/drawingml/2011/main" val="1"/>
+              <ma14:placeholderFlag xmlns:ma14="http://schemas.microsoft.com/office/mac/drawingml/2011/main" xmlns="" val="1"/>
             </a:ext>
           </a:extLst>
         </p:spPr>
@@ -1831,7 +1831,7 @@
               </a14:hiddenEffects>
             </a:ext>
             <a:ext uri="{FAA26D3D-D897-4be2-8F04-BA451C77F1D7}">
-              <ma14:placeholderFlag xmlns="" xmlns:ma14="http://schemas.microsoft.com/office/mac/drawingml/2011/main" val="1"/>
+              <ma14:placeholderFlag xmlns:ma14="http://schemas.microsoft.com/office/mac/drawingml/2011/main" xmlns="" val="1"/>
             </a:ext>
           </a:extLst>
         </p:spPr>
@@ -1916,7 +1916,7 @@
               </a14:hiddenEffects>
             </a:ext>
             <a:ext uri="{FAA26D3D-D897-4be2-8F04-BA451C77F1D7}">
-              <ma14:placeholderFlag xmlns="" xmlns:ma14="http://schemas.microsoft.com/office/mac/drawingml/2011/main" val="1"/>
+              <ma14:placeholderFlag xmlns:ma14="http://schemas.microsoft.com/office/mac/drawingml/2011/main" xmlns="" val="1"/>
             </a:ext>
           </a:extLst>
         </p:spPr>
@@ -2001,7 +2001,7 @@
               </a14:hiddenEffects>
             </a:ext>
             <a:ext uri="{FAA26D3D-D897-4be2-8F04-BA451C77F1D7}">
-              <ma14:placeholderFlag xmlns="" xmlns:ma14="http://schemas.microsoft.com/office/mac/drawingml/2011/main" val="1"/>
+              <ma14:placeholderFlag xmlns:ma14="http://schemas.microsoft.com/office/mac/drawingml/2011/main" xmlns="" val="1"/>
             </a:ext>
           </a:extLst>
         </p:spPr>
@@ -2086,7 +2086,7 @@
               </a14:hiddenEffects>
             </a:ext>
             <a:ext uri="{FAA26D3D-D897-4be2-8F04-BA451C77F1D7}">
-              <ma14:placeholderFlag xmlns="" xmlns:ma14="http://schemas.microsoft.com/office/mac/drawingml/2011/main" val="1"/>
+              <ma14:placeholderFlag xmlns:ma14="http://schemas.microsoft.com/office/mac/drawingml/2011/main" xmlns="" val="1"/>
             </a:ext>
           </a:extLst>
         </p:spPr>
@@ -2171,7 +2171,7 @@
               </a14:hiddenEffects>
             </a:ext>
             <a:ext uri="{FAA26D3D-D897-4be2-8F04-BA451C77F1D7}">
-              <ma14:placeholderFlag xmlns="" xmlns:ma14="http://schemas.microsoft.com/office/mac/drawingml/2011/main" val="1"/>
+              <ma14:placeholderFlag xmlns:ma14="http://schemas.microsoft.com/office/mac/drawingml/2011/main" xmlns="" val="1"/>
             </a:ext>
           </a:extLst>
         </p:spPr>
@@ -2256,7 +2256,7 @@
               </a14:hiddenEffects>
             </a:ext>
             <a:ext uri="{FAA26D3D-D897-4be2-8F04-BA451C77F1D7}">
-              <ma14:placeholderFlag xmlns="" xmlns:ma14="http://schemas.microsoft.com/office/mac/drawingml/2011/main" val="1"/>
+              <ma14:placeholderFlag xmlns:ma14="http://schemas.microsoft.com/office/mac/drawingml/2011/main" xmlns="" val="1"/>
             </a:ext>
           </a:extLst>
         </p:spPr>
@@ -2341,7 +2341,7 @@
               </a14:hiddenEffects>
             </a:ext>
             <a:ext uri="{FAA26D3D-D897-4be2-8F04-BA451C77F1D7}">
-              <ma14:placeholderFlag xmlns="" xmlns:ma14="http://schemas.microsoft.com/office/mac/drawingml/2011/main" val="1"/>
+              <ma14:placeholderFlag xmlns:ma14="http://schemas.microsoft.com/office/mac/drawingml/2011/main" xmlns="" val="1"/>
             </a:ext>
           </a:extLst>
         </p:spPr>
@@ -2426,7 +2426,7 @@
               </a14:hiddenEffects>
             </a:ext>
             <a:ext uri="{FAA26D3D-D897-4be2-8F04-BA451C77F1D7}">
-              <ma14:placeholderFlag xmlns="" xmlns:ma14="http://schemas.microsoft.com/office/mac/drawingml/2011/main" val="1"/>
+              <ma14:placeholderFlag xmlns:ma14="http://schemas.microsoft.com/office/mac/drawingml/2011/main" xmlns="" val="1"/>
             </a:ext>
           </a:extLst>
         </p:spPr>
@@ -2511,7 +2511,7 @@
               </a14:hiddenEffects>
             </a:ext>
             <a:ext uri="{FAA26D3D-D897-4be2-8F04-BA451C77F1D7}">
-              <ma14:placeholderFlag xmlns="" xmlns:ma14="http://schemas.microsoft.com/office/mac/drawingml/2011/main" val="1"/>
+              <ma14:placeholderFlag xmlns:ma14="http://schemas.microsoft.com/office/mac/drawingml/2011/main" xmlns="" val="1"/>
             </a:ext>
           </a:extLst>
         </p:spPr>
@@ -2596,7 +2596,7 @@
               </a14:hiddenEffects>
             </a:ext>
             <a:ext uri="{FAA26D3D-D897-4be2-8F04-BA451C77F1D7}">
-              <ma14:placeholderFlag xmlns="" xmlns:ma14="http://schemas.microsoft.com/office/mac/drawingml/2011/main" val="1"/>
+              <ma14:placeholderFlag xmlns:ma14="http://schemas.microsoft.com/office/mac/drawingml/2011/main" xmlns="" val="1"/>
             </a:ext>
           </a:extLst>
         </p:spPr>
@@ -2681,7 +2681,7 @@
               </a14:hiddenEffects>
             </a:ext>
             <a:ext uri="{FAA26D3D-D897-4be2-8F04-BA451C77F1D7}">
-              <ma14:placeholderFlag xmlns="" xmlns:ma14="http://schemas.microsoft.com/office/mac/drawingml/2011/main" val="1"/>
+              <ma14:placeholderFlag xmlns:ma14="http://schemas.microsoft.com/office/mac/drawingml/2011/main" xmlns="" val="1"/>
             </a:ext>
           </a:extLst>
         </p:spPr>
@@ -2766,7 +2766,7 @@
               </a14:hiddenEffects>
             </a:ext>
             <a:ext uri="{FAA26D3D-D897-4be2-8F04-BA451C77F1D7}">
-              <ma14:placeholderFlag xmlns="" xmlns:ma14="http://schemas.microsoft.com/office/mac/drawingml/2011/main" val="1"/>
+              <ma14:placeholderFlag xmlns:ma14="http://schemas.microsoft.com/office/mac/drawingml/2011/main" xmlns="" val="1"/>
             </a:ext>
           </a:extLst>
         </p:spPr>
@@ -2851,7 +2851,7 @@
               </a14:hiddenEffects>
             </a:ext>
             <a:ext uri="{FAA26D3D-D897-4be2-8F04-BA451C77F1D7}">
-              <ma14:placeholderFlag xmlns="" xmlns:ma14="http://schemas.microsoft.com/office/mac/drawingml/2011/main" val="1"/>
+              <ma14:placeholderFlag xmlns:ma14="http://schemas.microsoft.com/office/mac/drawingml/2011/main" xmlns="" val="1"/>
             </a:ext>
           </a:extLst>
         </p:spPr>
@@ -2936,7 +2936,7 @@
               </a14:hiddenEffects>
             </a:ext>
             <a:ext uri="{FAA26D3D-D897-4be2-8F04-BA451C77F1D7}">
-              <ma14:placeholderFlag xmlns="" xmlns:ma14="http://schemas.microsoft.com/office/mac/drawingml/2011/main" val="1"/>
+              <ma14:placeholderFlag xmlns:ma14="http://schemas.microsoft.com/office/mac/drawingml/2011/main" xmlns="" val="1"/>
             </a:ext>
           </a:extLst>
         </p:spPr>
@@ -3021,7 +3021,7 @@
               </a14:hiddenEffects>
             </a:ext>
             <a:ext uri="{FAA26D3D-D897-4be2-8F04-BA451C77F1D7}">
-              <ma14:placeholderFlag xmlns="" xmlns:ma14="http://schemas.microsoft.com/office/mac/drawingml/2011/main" val="1"/>
+              <ma14:placeholderFlag xmlns:ma14="http://schemas.microsoft.com/office/mac/drawingml/2011/main" xmlns="" val="1"/>
             </a:ext>
           </a:extLst>
         </p:spPr>
@@ -3106,7 +3106,7 @@
               </a14:hiddenEffects>
             </a:ext>
             <a:ext uri="{FAA26D3D-D897-4be2-8F04-BA451C77F1D7}">
-              <ma14:placeholderFlag xmlns="" xmlns:ma14="http://schemas.microsoft.com/office/mac/drawingml/2011/main" val="1"/>
+              <ma14:placeholderFlag xmlns:ma14="http://schemas.microsoft.com/office/mac/drawingml/2011/main" xmlns="" val="1"/>
             </a:ext>
           </a:extLst>
         </p:spPr>
@@ -3191,7 +3191,7 @@
               </a14:hiddenEffects>
             </a:ext>
             <a:ext uri="{FAA26D3D-D897-4be2-8F04-BA451C77F1D7}">
-              <ma14:placeholderFlag xmlns="" xmlns:ma14="http://schemas.microsoft.com/office/mac/drawingml/2011/main" val="1"/>
+              <ma14:placeholderFlag xmlns:ma14="http://schemas.microsoft.com/office/mac/drawingml/2011/main" xmlns="" val="1"/>
             </a:ext>
           </a:extLst>
         </p:spPr>
@@ -3276,7 +3276,7 @@
               </a14:hiddenEffects>
             </a:ext>
             <a:ext uri="{FAA26D3D-D897-4be2-8F04-BA451C77F1D7}">
-              <ma14:placeholderFlag xmlns="" xmlns:ma14="http://schemas.microsoft.com/office/mac/drawingml/2011/main" val="1"/>
+              <ma14:placeholderFlag xmlns:ma14="http://schemas.microsoft.com/office/mac/drawingml/2011/main" xmlns="" val="1"/>
             </a:ext>
           </a:extLst>
         </p:spPr>
@@ -3361,7 +3361,7 @@
               </a14:hiddenEffects>
             </a:ext>
             <a:ext uri="{FAA26D3D-D897-4be2-8F04-BA451C77F1D7}">
-              <ma14:placeholderFlag xmlns="" xmlns:ma14="http://schemas.microsoft.com/office/mac/drawingml/2011/main" val="1"/>
+              <ma14:placeholderFlag xmlns:ma14="http://schemas.microsoft.com/office/mac/drawingml/2011/main" xmlns="" val="1"/>
             </a:ext>
           </a:extLst>
         </p:spPr>
@@ -3446,7 +3446,7 @@
               </a14:hiddenEffects>
             </a:ext>
             <a:ext uri="{FAA26D3D-D897-4be2-8F04-BA451C77F1D7}">
-              <ma14:placeholderFlag xmlns="" xmlns:ma14="http://schemas.microsoft.com/office/mac/drawingml/2011/main" val="1"/>
+              <ma14:placeholderFlag xmlns:ma14="http://schemas.microsoft.com/office/mac/drawingml/2011/main" xmlns="" val="1"/>
             </a:ext>
           </a:extLst>
         </p:spPr>
@@ -3531,7 +3531,7 @@
               </a14:hiddenEffects>
             </a:ext>
             <a:ext uri="{FAA26D3D-D897-4be2-8F04-BA451C77F1D7}">
-              <ma14:placeholderFlag xmlns="" xmlns:ma14="http://schemas.microsoft.com/office/mac/drawingml/2011/main" val="1"/>
+              <ma14:placeholderFlag xmlns:ma14="http://schemas.microsoft.com/office/mac/drawingml/2011/main" xmlns="" val="1"/>
             </a:ext>
           </a:extLst>
         </p:spPr>
@@ -3616,7 +3616,7 @@
               </a14:hiddenEffects>
             </a:ext>
             <a:ext uri="{FAA26D3D-D897-4be2-8F04-BA451C77F1D7}">
-              <ma14:placeholderFlag xmlns="" xmlns:ma14="http://schemas.microsoft.com/office/mac/drawingml/2011/main" val="1"/>
+              <ma14:placeholderFlag xmlns:ma14="http://schemas.microsoft.com/office/mac/drawingml/2011/main" xmlns="" val="1"/>
             </a:ext>
           </a:extLst>
         </p:spPr>
@@ -3701,7 +3701,7 @@
               </a14:hiddenEffects>
             </a:ext>
             <a:ext uri="{FAA26D3D-D897-4be2-8F04-BA451C77F1D7}">
-              <ma14:placeholderFlag xmlns="" xmlns:ma14="http://schemas.microsoft.com/office/mac/drawingml/2011/main" val="1"/>
+              <ma14:placeholderFlag xmlns:ma14="http://schemas.microsoft.com/office/mac/drawingml/2011/main" xmlns="" val="1"/>
             </a:ext>
           </a:extLst>
         </p:spPr>
@@ -3860,7 +3860,7 @@
           <a:p>
             <a:fld id="{6D2DC8F3-C415-6641-9620-75163596B5B4}" type="datetimeFigureOut">
               <a:rPr lang="en-US" smtClean="0"/>
-              <a:t>9/21/25</a:t>
+              <a:t>9/11/26</a:t>
             </a:fld>
             <a:endParaRPr lang="en-US"/>
           </a:p>
@@ -4028,7 +4028,7 @@
           <a:p>
             <a:fld id="{6D2DC8F3-C415-6641-9620-75163596B5B4}" type="datetimeFigureOut">
               <a:rPr lang="en-US" smtClean="0"/>
-              <a:t>9/21/25</a:t>
+              <a:t>9/11/26</a:t>
             </a:fld>
             <a:endParaRPr lang="en-US"/>
           </a:p>
@@ -4206,7 +4206,7 @@
           <a:p>
             <a:fld id="{6D2DC8F3-C415-6641-9620-75163596B5B4}" type="datetimeFigureOut">
               <a:rPr lang="en-US" smtClean="0"/>
-              <a:t>9/21/25</a:t>
+              <a:t>9/11/26</a:t>
             </a:fld>
             <a:endParaRPr lang="en-US"/>
           </a:p>
@@ -4374,7 +4374,7 @@
           <a:p>
             <a:fld id="{6D2DC8F3-C415-6641-9620-75163596B5B4}" type="datetimeFigureOut">
               <a:rPr lang="en-US" smtClean="0"/>
-              <a:t>9/21/25</a:t>
+              <a:t>9/11/26</a:t>
             </a:fld>
             <a:endParaRPr lang="en-US"/>
           </a:p>
@@ -4619,7 +4619,7 @@
           <a:p>
             <a:fld id="{6D2DC8F3-C415-6641-9620-75163596B5B4}" type="datetimeFigureOut">
               <a:rPr lang="en-US" smtClean="0"/>
-              <a:t>9/21/25</a:t>
+              <a:t>9/11/26</a:t>
             </a:fld>
             <a:endParaRPr lang="en-US"/>
           </a:p>
@@ -4848,7 +4848,7 @@
           <a:p>
             <a:fld id="{6D2DC8F3-C415-6641-9620-75163596B5B4}" type="datetimeFigureOut">
               <a:rPr lang="en-US" smtClean="0"/>
-              <a:t>9/21/25</a:t>
+              <a:t>9/11/26</a:t>
             </a:fld>
             <a:endParaRPr lang="en-US"/>
           </a:p>
@@ -5212,7 +5212,7 @@
           <a:p>
             <a:fld id="{6D2DC8F3-C415-6641-9620-75163596B5B4}" type="datetimeFigureOut">
               <a:rPr lang="en-US" smtClean="0"/>
-              <a:t>9/21/25</a:t>
+              <a:t>9/11/26</a:t>
             </a:fld>
             <a:endParaRPr lang="en-US"/>
           </a:p>
@@ -5329,7 +5329,7 @@
           <a:p>
             <a:fld id="{6D2DC8F3-C415-6641-9620-75163596B5B4}" type="datetimeFigureOut">
               <a:rPr lang="en-US" smtClean="0"/>
-              <a:t>9/21/25</a:t>
+              <a:t>9/11/26</a:t>
             </a:fld>
             <a:endParaRPr lang="en-US"/>
           </a:p>
@@ -5424,7 +5424,7 @@
           <a:p>
             <a:fld id="{6D2DC8F3-C415-6641-9620-75163596B5B4}" type="datetimeFigureOut">
               <a:rPr lang="en-US" smtClean="0"/>
-              <a:t>9/21/25</a:t>
+              <a:t>9/11/26</a:t>
             </a:fld>
             <a:endParaRPr lang="en-US"/>
           </a:p>
@@ -5699,7 +5699,7 @@
           <a:p>
             <a:fld id="{6D2DC8F3-C415-6641-9620-75163596B5B4}" type="datetimeFigureOut">
               <a:rPr lang="en-US" smtClean="0"/>
-              <a:t>9/21/25</a:t>
+              <a:t>9/11/26</a:t>
             </a:fld>
             <a:endParaRPr lang="en-US"/>
           </a:p>
@@ -5951,7 +5951,7 @@
           <a:p>
             <a:fld id="{6D2DC8F3-C415-6641-9620-75163596B5B4}" type="datetimeFigureOut">
               <a:rPr lang="en-US" smtClean="0"/>
-              <a:t>9/21/25</a:t>
+              <a:t>9/11/26</a:t>
             </a:fld>
             <a:endParaRPr lang="en-US"/>
           </a:p>
@@ -6162,7 +6162,7 @@
           <a:p>
             <a:fld id="{6D2DC8F3-C415-6641-9620-75163596B5B4}" type="datetimeFigureOut">
               <a:rPr lang="en-US" smtClean="0"/>
-              <a:t>9/21/25</a:t>
+              <a:t>9/11/26</a:t>
             </a:fld>
             <a:endParaRPr lang="en-US"/>
           </a:p>
@@ -8559,41 +8559,23 @@
               <a:defRPr/>
             </a:pPr>
             <a:r>
-              <a:rPr lang="en-AU" altLang="en-US" sz="2000" dirty="0" err="1">
-                <a:latin typeface="Arial" charset="0"/>
-              </a:rPr>
-              <a:t>Prob</a:t>
-            </a:r>
-            <a:r>
               <a:rPr lang="en-AU" altLang="en-US" sz="2000" dirty="0">
                 <a:latin typeface="Arial" charset="0"/>
               </a:rPr>
-              <a:t> &lt;- </a:t>
-            </a:r>
-            <a:r>
-              <a:rPr lang="en-AU" altLang="en-US" sz="2000" dirty="0" err="1">
-                <a:latin typeface="Arial" charset="0"/>
-              </a:rPr>
-              <a:t>seq</a:t>
-            </a:r>
+              <a:t>Prob &lt;- seq(from=0.01,to=0.99,by=0.01)</a:t>
+            </a:r>
+          </a:p>
+          <a:p>
+            <a:pPr eaLnBrk="1" hangingPunct="1">
+              <a:buFont typeface="Wingdings" charset="2"/>
+              <a:buChar char="Ø"/>
+              <a:defRPr/>
+            </a:pPr>
             <a:r>
               <a:rPr lang="en-AU" altLang="en-US" sz="2000" dirty="0">
                 <a:latin typeface="Arial" charset="0"/>
               </a:rPr>
-              <a:t>(from=0.01,to=0.99,by=0.01)</a:t>
-            </a:r>
-          </a:p>
-          <a:p>
-            <a:pPr eaLnBrk="1" hangingPunct="1">
-              <a:buFont typeface="Wingdings" charset="2"/>
-              <a:buChar char="Ø"/>
-              <a:defRPr/>
-            </a:pPr>
-            <a:r>
-              <a:rPr lang="en-AU" altLang="en-US" sz="2000" dirty="0">
-                <a:latin typeface="Arial" charset="0"/>
-              </a:rPr>
-              <a:t>Like &lt;- Probs^30*(1-Probs)^20</a:t>
+              <a:t>Like &lt;- Prob^30*(1-Prob)^20</a:t>
             </a:r>
           </a:p>
           <a:p>
@@ -8845,19 +8827,7 @@
               <a:rPr lang="en-AU" altLang="en-US" sz="2000" dirty="0">
                 <a:latin typeface="Arial" charset="0"/>
               </a:rPr>
-              <a:t>print(</a:t>
-            </a:r>
-            <a:r>
-              <a:rPr lang="en-AU" altLang="en-US" sz="2000" dirty="0" err="1">
-                <a:latin typeface="Arial" charset="0"/>
-              </a:rPr>
-              <a:t>Probs</a:t>
-            </a:r>
-            <a:r>
-              <a:rPr lang="en-AU" altLang="en-US" sz="2000" dirty="0">
-                <a:latin typeface="Arial" charset="0"/>
-              </a:rPr>
-              <a:t>[</a:t>
+              <a:t>print(Prob[</a:t>
             </a:r>
             <a:r>
               <a:rPr lang="en-AU" altLang="en-US" sz="2000" dirty="0" err="1">
@@ -12829,7 +12799,7 @@
             </a:r>
             <a:r>
               <a:rPr lang="en-AU" altLang="en-US" sz="1800" dirty="0"/>
-              <a:t> &lt;- matrix(scan(”Whale.</a:t>
+              <a:t> &lt;- matrix(scan("Whale.</a:t>
             </a:r>
             <a:r>
               <a:rPr lang="en-AU" altLang="en-US" sz="1800" dirty="0" err="1"/>
@@ -19670,7 +19640,7 @@
               </a14:hiddenEffects>
             </a:ext>
             <a:ext uri="{FAA26D3D-D897-4be2-8F04-BA451C77F1D7}">
-              <ma14:placeholderFlag xmlns="" xmlns:ma14="http://schemas.microsoft.com/office/mac/drawingml/2011/main" val="1"/>
+              <ma14:placeholderFlag xmlns:ma14="http://schemas.microsoft.com/office/mac/drawingml/2011/main" xmlns="" val="1"/>
             </a:ext>
           </a:extLst>
         </p:spPr>
@@ -20326,7 +20296,7 @@
               </a14:hiddenEffects>
             </a:ext>
             <a:ext uri="{FAA26D3D-D897-4be2-8F04-BA451C77F1D7}">
-              <ma14:placeholderFlag xmlns="" xmlns:ma14="http://schemas.microsoft.com/office/mac/drawingml/2011/main" val="1"/>
+              <ma14:placeholderFlag xmlns:ma14="http://schemas.microsoft.com/office/mac/drawingml/2011/main" xmlns="" val="1"/>
             </a:ext>
           </a:extLst>
         </p:spPr>
